--- a/ONE_PAGER.pptx
+++ b/ONE_PAGER.pptx
@@ -4050,7 +4050,7 @@
                 </a:solidFill>
                 <a:latin typeface="Calibri"/>
               </a:rPr>
-              <a:t>📊  23% of new EV deployments</a:t>
+              <a:t>📊  100s of incorrect invoices per day</a:t>
             </a:r>
           </a:p>
         </p:txBody>
@@ -4085,7 +4085,7 @@
                 </a:solidFill>
                 <a:latin typeface="Calibri"/>
               </a:rPr>
-              <a:t>report billing or connectivity defects within 30 days of go-live</a:t>
+              <a:t>from a single billing defect across just 100 charging stations</a:t>
             </a:r>
           </a:p>
         </p:txBody>
